--- a/HorRAGor_presentation.pptx
+++ b/HorRAGor_presentation.pptx
@@ -4,14 +4,14 @@
   <p:sldMasterIdLst>
     <p:sldMasterId id="2147483648" r:id="rId1"/>
   </p:sldMasterIdLst>
+  <p:notesMasterIdLst>
+    <p:notesMasterId r:id="rId4"/>
+  </p:notesMasterIdLst>
   <p:sldIdLst>
     <p:sldId id="256" r:id="rId2"/>
     <p:sldId id="257" r:id="rId3"/>
   </p:sldIdLst>
-  <p:notesMasterIdLst>
-    <p:notesMasterId r:id="rId4"/>
-  </p:notesMasterIdLst>
-  <p:sldSz cx="9144000" cy="5143500"/>
+  <p:sldSz cx="9144000" cy="5143500" type="screen16x9"/>
   <p:notesSz cx="5143500" cy="9144000"/>
   <p:defaultTextStyle>
     <a:lvl1pPr marL="0" algn="l" defTabSz="914400" rtl="0" eaLnBrk="1" latinLnBrk="0" hangingPunct="1">
@@ -105,6 +105,11 @@
       </a:defRPr>
     </a:lvl9pPr>
   </p:defaultTextStyle>
+  <p:extLst>
+    <p:ext uri="{EFAFB233-063F-42B5-8137-9DF3F51BA10A}">
+      <p15:sldGuideLst xmlns:p15="http://schemas.microsoft.com/office/powerpoint/2012/main"/>
+    </p:ext>
+  </p:extLst>
 </p:presentation>
 </file>
 
@@ -130,234 +135,10 @@
           <a:chExt cx="0" cy="0"/>
         </a:xfrm>
       </p:grpSpPr>
-      <p:sp>
-        <p:nvSpPr>
-          <p:cNvPr id="2" name="Header Placeholder 1"/>
-          <p:cNvSpPr>
-            <a:spLocks noGrp="1"/>
-          </p:cNvSpPr>
-          <p:nvPr>
-            <p:ph type="hdr" sz="quarter"/>
-          </p:nvPr>
-        </p:nvSpPr>
-        <p:spPr>
-          <a:xfrm>
-            <a:off x="0" y="0"/>
-            <a:ext cx="2971800" cy="458788"/>
-          </a:xfrm>
-          <a:prstGeom prst="rect">
-            <a:avLst/>
-          </a:prstGeom>
-        </p:spPr>
-        <p:txBody>
-          <a:bodyPr vert="horz" lIns="91440" tIns="45720" rIns="91440" bIns="45720" rtlCol="0"/>
-          <a:lstStyle>
-            <a:lvl1pPr algn="l">
-              <a:defRPr sz="1200"/>
-            </a:lvl1pPr>
-          </a:lstStyle>
-          <a:p>
-            <a:endParaRPr lang="en-US"/>
-          </a:p>
-        </p:txBody>
-      </p:sp>
-      <p:sp>
-        <p:nvSpPr>
-          <p:cNvPr id="3" name="Date Placeholder 2"/>
-          <p:cNvSpPr>
-            <a:spLocks noGrp="1"/>
-          </p:cNvSpPr>
-          <p:nvPr>
-            <p:ph type="dt" idx="1"/>
-          </p:nvPr>
-        </p:nvSpPr>
-        <p:spPr>
-          <a:xfrm>
-            <a:off x="3884613" y="0"/>
-            <a:ext cx="2971800" cy="458788"/>
-          </a:xfrm>
-          <a:prstGeom prst="rect">
-            <a:avLst/>
-          </a:prstGeom>
-        </p:spPr>
-        <p:txBody>
-          <a:bodyPr vert="horz" lIns="91440" tIns="45720" rIns="91440" bIns="45720" rtlCol="0"/>
-          <a:lstStyle>
-            <a:lvl1pPr algn="r">
-              <a:defRPr sz="1200"/>
-            </a:lvl1pPr>
-          </a:lstStyle>
-          <a:p>
-            <a:fld id="{5282F153-3F37-0F45-9E97-73ACFA13230C}" type="datetimeFigureOut">
-              <a:rPr lang="en-US"/>
-              <a:t>7/23/19</a:t>
-            </a:fld>
-            <a:endParaRPr lang="en-US"/>
-          </a:p>
-        </p:txBody>
-      </p:sp>
-      <p:sp>
-        <p:nvSpPr>
-          <p:cNvPr id="4" name="Slide Image Placeholder 3"/>
-          <p:cNvSpPr>
-            <a:spLocks noGrp="1" noRot="1" noChangeAspect="1"/>
-          </p:cNvSpPr>
-          <p:nvPr>
-            <p:ph type="sldImg" idx="2"/>
-          </p:nvPr>
-        </p:nvSpPr>
-        <p:spPr>
-          <a:xfrm>
-            <a:off x="685800" y="1143000"/>
-            <a:ext cx="5486400" cy="3086100"/>
-          </a:xfrm>
-          <a:prstGeom prst="rect">
-            <a:avLst/>
-          </a:prstGeom>
-          <a:noFill/>
-          <a:ln w="12700">
-            <a:solidFill>
-              <a:prstClr val="black"/>
-            </a:solidFill>
-          </a:ln>
-        </p:spPr>
-        <p:txBody>
-          <a:bodyPr vert="horz" lIns="91440" tIns="45720" rIns="91440" bIns="45720" rtlCol="0" anchor="ctr"/>
-          <a:lstStyle/>
-          <a:p>
-            <a:endParaRPr lang="en-US"/>
-          </a:p>
-        </p:txBody>
-      </p:sp>
-      <p:sp>
-        <p:nvSpPr>
-          <p:cNvPr id="5" name="Notes Placeholder 4"/>
-          <p:cNvSpPr>
-            <a:spLocks noGrp="1"/>
-          </p:cNvSpPr>
-          <p:nvPr>
-            <p:ph type="body" sz="quarter" idx="3"/>
-          </p:nvPr>
-        </p:nvSpPr>
-        <p:spPr>
-          <a:xfrm>
-            <a:off x="685800" y="4400550"/>
-            <a:ext cx="5486400" cy="3600450"/>
-          </a:xfrm>
-          <a:prstGeom prst="rect">
-            <a:avLst/>
-          </a:prstGeom>
-        </p:spPr>
-        <p:txBody>
-          <a:bodyPr vert="horz" lIns="91440" tIns="45720" rIns="91440" bIns="45720" rtlCol="0"/>
-          <a:lstStyle/>
-          <a:p>
-            <a:pPr lvl="0"/>
-            <a:r>
-              <a:rPr lang="en-US"/>
-              <a:t>Click to edit Master text styles</a:t>
-            </a:r>
-          </a:p>
-          <a:p>
-            <a:pPr lvl="1"/>
-            <a:r>
-              <a:rPr lang="en-US"/>
-              <a:t>Second level</a:t>
-            </a:r>
-          </a:p>
-          <a:p>
-            <a:pPr lvl="2"/>
-            <a:r>
-              <a:rPr lang="en-US"/>
-              <a:t>Third level</a:t>
-            </a:r>
-          </a:p>
-          <a:p>
-            <a:pPr lvl="3"/>
-            <a:r>
-              <a:rPr lang="en-US"/>
-              <a:t>Fourth level</a:t>
-            </a:r>
-          </a:p>
-          <a:p>
-            <a:pPr lvl="4"/>
-            <a:r>
-              <a:rPr lang="en-US"/>
-              <a:t>Fifth level</a:t>
-            </a:r>
-          </a:p>
-        </p:txBody>
-      </p:sp>
-      <p:sp>
-        <p:nvSpPr>
-          <p:cNvPr id="6" name="Footer Placeholder 5"/>
-          <p:cNvSpPr>
-            <a:spLocks noGrp="1"/>
-          </p:cNvSpPr>
-          <p:nvPr>
-            <p:ph type="ftr" sz="quarter" idx="4"/>
-          </p:nvPr>
-        </p:nvSpPr>
-        <p:spPr>
-          <a:xfrm>
-            <a:off x="0" y="8685213"/>
-            <a:ext cx="2971800" cy="458787"/>
-          </a:xfrm>
-          <a:prstGeom prst="rect">
-            <a:avLst/>
-          </a:prstGeom>
-        </p:spPr>
-        <p:txBody>
-          <a:bodyPr vert="horz" lIns="91440" tIns="45720" rIns="91440" bIns="45720" rtlCol="0" anchor="b"/>
-          <a:lstStyle>
-            <a:lvl1pPr algn="l">
-              <a:defRPr sz="1200"/>
-            </a:lvl1pPr>
-          </a:lstStyle>
-          <a:p>
-            <a:endParaRPr lang="en-US"/>
-          </a:p>
-        </p:txBody>
-      </p:sp>
-      <p:sp>
-        <p:nvSpPr>
-          <p:cNvPr id="7" name="Slide Number Placeholder 6"/>
-          <p:cNvSpPr>
-            <a:spLocks noGrp="1"/>
-          </p:cNvSpPr>
-          <p:nvPr>
-            <p:ph type="sldNum" sz="quarter" idx="5"/>
-          </p:nvPr>
-        </p:nvSpPr>
-        <p:spPr>
-          <a:xfrm>
-            <a:off x="3884613" y="8685213"/>
-            <a:ext cx="2971800" cy="458787"/>
-          </a:xfrm>
-          <a:prstGeom prst="rect">
-            <a:avLst/>
-          </a:prstGeom>
-        </p:spPr>
-        <p:txBody>
-          <a:bodyPr vert="horz" lIns="91440" tIns="45720" rIns="91440" bIns="45720" rtlCol="0" anchor="b"/>
-          <a:lstStyle>
-            <a:lvl1pPr algn="r">
-              <a:defRPr sz="1200"/>
-            </a:lvl1pPr>
-          </a:lstStyle>
-          <a:p>
-            <a:fld id="{CE5E9CC1-C706-0F49-92D6-E571CC5EEA8F}" type="slidenum">
-              <a:rPr lang="en-US"/>
-              <a:t>‹#›</a:t>
-            </a:fld>
-            <a:endParaRPr lang="en-US"/>
-          </a:p>
-        </p:txBody>
-      </p:sp>
     </p:spTree>
     <p:extLst>
       <p:ext uri="{BB962C8B-B14F-4D97-AF65-F5344CB8AC3E}">
-        <p14:creationId xmlns:p14="http://schemas.microsoft.com/office/powerpoint/2010/main" val="1024086991"/>
+        <p14:creationId xmlns:p14="http://schemas.microsoft.com/office/powerpoint/2010/main" val="3743083977"/>
       </p:ext>
     </p:extLst>
   </p:cSld>
@@ -501,10 +282,6 @@
           <a:bodyPr/>
           <a:lstStyle/>
           <a:p>
-            <a:r>
-              <a:rPr lang="en-US" dirty="0"/>
-              <a:t/>
-            </a:r>
             <a:endParaRPr lang="en-US" dirty="0"/>
           </a:p>
         </p:txBody>
@@ -589,10 +366,6 @@
           <a:bodyPr/>
           <a:lstStyle/>
           <a:p>
-            <a:r>
-              <a:rPr lang="en-US" dirty="0"/>
-              <a:t/>
-            </a:r>
             <a:endParaRPr lang="en-US" dirty="0"/>
           </a:p>
         </p:txBody>
@@ -666,6 +439,11 @@
 <file path=ppt/slideMasters/slideMaster1.xml><?xml version="1.0" encoding="utf-8"?>
 <p:sldMaster xmlns:a="http://schemas.openxmlformats.org/drawingml/2006/main" xmlns:r="http://schemas.openxmlformats.org/officeDocument/2006/relationships" xmlns:p="http://schemas.openxmlformats.org/presentationml/2006/main">
   <p:cSld>
+    <p:bg>
+      <p:bgRef idx="1001">
+        <a:schemeClr val="bg1"/>
+      </p:bgRef>
+    </p:bg>
     <p:spTree>
       <p:nvGrpSpPr>
         <p:cNvPr id="1" name=""/>
@@ -946,7 +724,7 @@
     <p:bg>
       <p:bgPr>
         <a:blipFill dpi="0" rotWithShape="1">
-          <a:blip r:embed="rId1">
+          <a:blip r:embed="rId3">
             <a:lum/>
           </a:blip>
           <a:srcRect/>
@@ -992,7 +770,7 @@
           <a:bodyPr wrap="square" lIns="0" tIns="0" rIns="0" bIns="0" rtlCol="0" anchor="ctr"/>
           <a:lstStyle/>
           <a:p>
-            <a:pPr indent="0" marL="0">
+            <a:pPr marL="0" indent="0">
               <a:buNone/>
             </a:pPr>
             <a:r>
@@ -1031,7 +809,7 @@
           <a:bodyPr wrap="square" lIns="0" tIns="0" rIns="0" bIns="0" rtlCol="0" anchor="ctr"/>
           <a:lstStyle/>
           <a:p>
-            <a:pPr indent="0" marL="0">
+            <a:pPr marL="0" indent="0">
               <a:buNone/>
             </a:pPr>
             <a:r>
@@ -1072,6 +850,13 @@
           </a:solidFill>
           <a:ln/>
         </p:spPr>
+        <p:txBody>
+          <a:bodyPr/>
+          <a:lstStyle/>
+          <a:p>
+            <a:endParaRPr lang="fr-FR"/>
+          </a:p>
+        </p:txBody>
       </p:sp>
       <p:sp>
         <p:nvSpPr>
@@ -1092,17 +877,24 @@
           </a:solidFill>
           <a:ln/>
         </p:spPr>
+        <p:txBody>
+          <a:bodyPr/>
+          <a:lstStyle/>
+          <a:p>
+            <a:endParaRPr lang="fr-FR"/>
+          </a:p>
+        </p:txBody>
       </p:sp>
       <p:pic>
         <p:nvPicPr>
-          <p:cNvPr id="6" name="Image 0" descr="/home/claude/icons/bullseye_w.png">    </p:cNvPr>
+          <p:cNvPr id="6" name="Image 0" descr="/home/claude/icons/bullseye_w.png"/>
           <p:cNvPicPr>
             <a:picLocks noChangeAspect="1"/>
           </p:cNvPicPr>
           <p:nvPr/>
         </p:nvPicPr>
         <p:blipFill>
-          <a:blip r:embed="rId2"/>
+          <a:blip r:embed="rId4"/>
           <a:stretch>
             <a:fillRect/>
           </a:stretch>
@@ -1138,7 +930,7 @@
           <a:bodyPr wrap="square" lIns="0" tIns="0" rIns="0" bIns="0" rtlCol="0" anchor="ctr"/>
           <a:lstStyle/>
           <a:p>
-            <a:pPr indent="0" marL="0">
+            <a:pPr marL="0" indent="0">
               <a:buNone/>
             </a:pPr>
             <a:r>
@@ -1177,7 +969,7 @@
           <a:bodyPr wrap="square" lIns="0" tIns="0" rIns="0" bIns="0" rtlCol="0" anchor="ctr"/>
           <a:lstStyle/>
           <a:p>
-            <a:pPr indent="0" marL="0">
+            <a:pPr marL="0" indent="0">
               <a:buNone/>
             </a:pPr>
             <a:r>
@@ -1218,6 +1010,13 @@
           </a:solidFill>
           <a:ln/>
         </p:spPr>
+        <p:txBody>
+          <a:bodyPr/>
+          <a:lstStyle/>
+          <a:p>
+            <a:endParaRPr lang="fr-FR"/>
+          </a:p>
+        </p:txBody>
       </p:sp>
       <p:sp>
         <p:nvSpPr>
@@ -1238,17 +1037,24 @@
           </a:solidFill>
           <a:ln/>
         </p:spPr>
+        <p:txBody>
+          <a:bodyPr/>
+          <a:lstStyle/>
+          <a:p>
+            <a:endParaRPr lang="fr-FR"/>
+          </a:p>
+        </p:txBody>
       </p:sp>
       <p:pic>
         <p:nvPicPr>
-          <p:cNvPr id="11" name="Image 1" descr="/home/claude/icons/random_w.png">    </p:cNvPr>
+          <p:cNvPr id="11" name="Image 1" descr="/home/claude/icons/random_w.png"/>
           <p:cNvPicPr>
             <a:picLocks noChangeAspect="1"/>
           </p:cNvPicPr>
           <p:nvPr/>
         </p:nvPicPr>
         <p:blipFill>
-          <a:blip r:embed="rId3"/>
+          <a:blip r:embed="rId5"/>
           <a:stretch>
             <a:fillRect/>
           </a:stretch>
@@ -1284,7 +1090,7 @@
           <a:bodyPr wrap="square" lIns="0" tIns="0" rIns="0" bIns="0" rtlCol="0" anchor="ctr"/>
           <a:lstStyle/>
           <a:p>
-            <a:pPr indent="0" marL="0">
+            <a:pPr marL="0" indent="0">
               <a:buNone/>
             </a:pPr>
             <a:r>
@@ -1323,7 +1129,7 @@
           <a:bodyPr wrap="square" lIns="0" tIns="0" rIns="0" bIns="0" rtlCol="0" anchor="t"/>
           <a:lstStyle/>
           <a:p>
-            <a:pPr indent="0" marL="0">
+            <a:pPr marL="0" indent="0">
               <a:buNone/>
             </a:pPr>
             <a:r>
@@ -1364,6 +1170,13 @@
           </a:solidFill>
           <a:ln/>
         </p:spPr>
+        <p:txBody>
+          <a:bodyPr/>
+          <a:lstStyle/>
+          <a:p>
+            <a:endParaRPr lang="fr-FR"/>
+          </a:p>
+        </p:txBody>
       </p:sp>
       <p:sp>
         <p:nvSpPr>
@@ -1384,17 +1197,24 @@
           </a:solidFill>
           <a:ln/>
         </p:spPr>
+        <p:txBody>
+          <a:bodyPr/>
+          <a:lstStyle/>
+          <a:p>
+            <a:endParaRPr lang="fr-FR"/>
+          </a:p>
+        </p:txBody>
       </p:sp>
       <p:pic>
         <p:nvPicPr>
-          <p:cNvPr id="16" name="Image 2" descr="/home/claude/icons/brain_w.png">    </p:cNvPr>
+          <p:cNvPr id="16" name="Image 2" descr="/home/claude/icons/brain_w.png"/>
           <p:cNvPicPr>
             <a:picLocks noChangeAspect="1"/>
           </p:cNvPicPr>
           <p:nvPr/>
         </p:nvPicPr>
         <p:blipFill>
-          <a:blip r:embed="rId4"/>
+          <a:blip r:embed="rId6"/>
           <a:stretch>
             <a:fillRect/>
           </a:stretch>
@@ -1430,7 +1250,7 @@
           <a:bodyPr wrap="square" lIns="0" tIns="0" rIns="0" bIns="0" rtlCol="0" anchor="ctr"/>
           <a:lstStyle/>
           <a:p>
-            <a:pPr indent="0" marL="0">
+            <a:pPr marL="0" indent="0">
               <a:buNone/>
             </a:pPr>
             <a:r>
@@ -1469,7 +1289,7 @@
           <a:bodyPr wrap="square" lIns="0" tIns="0" rIns="0" bIns="0" rtlCol="0" anchor="t"/>
           <a:lstStyle/>
           <a:p>
-            <a:pPr indent="0" marL="0">
+            <a:pPr marL="0" indent="0">
               <a:buNone/>
             </a:pPr>
             <a:r>
@@ -1510,6 +1330,13 @@
           </a:solidFill>
           <a:ln/>
         </p:spPr>
+        <p:txBody>
+          <a:bodyPr/>
+          <a:lstStyle/>
+          <a:p>
+            <a:endParaRPr lang="fr-FR"/>
+          </a:p>
+        </p:txBody>
       </p:sp>
       <p:sp>
         <p:nvSpPr>
@@ -1530,17 +1357,24 @@
           </a:solidFill>
           <a:ln/>
         </p:spPr>
+        <p:txBody>
+          <a:bodyPr/>
+          <a:lstStyle/>
+          <a:p>
+            <a:endParaRPr lang="fr-FR"/>
+          </a:p>
+        </p:txBody>
       </p:sp>
       <p:pic>
         <p:nvPicPr>
-          <p:cNvPr id="21" name="Image 3" descr="/home/claude/icons/layers_w.png">    </p:cNvPr>
+          <p:cNvPr id="21" name="Image 3" descr="/home/claude/icons/layers_w.png"/>
           <p:cNvPicPr>
             <a:picLocks noChangeAspect="1"/>
           </p:cNvPicPr>
           <p:nvPr/>
         </p:nvPicPr>
         <p:blipFill>
-          <a:blip r:embed="rId5"/>
+          <a:blip r:embed="rId7"/>
           <a:stretch>
             <a:fillRect/>
           </a:stretch>
@@ -1576,7 +1410,7 @@
           <a:bodyPr wrap="square" lIns="0" tIns="0" rIns="0" bIns="0" rtlCol="0" anchor="ctr"/>
           <a:lstStyle/>
           <a:p>
-            <a:pPr indent="0" marL="0">
+            <a:pPr marL="0" indent="0">
               <a:buNone/>
             </a:pPr>
             <a:r>
@@ -1615,7 +1449,7 @@
           <a:bodyPr wrap="square" lIns="0" tIns="0" rIns="0" bIns="0" rtlCol="0" anchor="t"/>
           <a:lstStyle/>
           <a:p>
-            <a:pPr indent="0" marL="0">
+            <a:pPr marL="0" indent="0">
               <a:buNone/>
             </a:pPr>
             <a:r>
@@ -1647,7 +1481,7 @@
     <p:bg>
       <p:bgPr>
         <a:blipFill dpi="0" rotWithShape="1">
-          <a:blip r:embed="rId1">
+          <a:blip r:embed="rId3">
             <a:lum/>
           </a:blip>
           <a:srcRect/>
@@ -1693,7 +1527,7 @@
           <a:bodyPr wrap="square" lIns="0" tIns="0" rIns="0" bIns="0" rtlCol="0" anchor="ctr"/>
           <a:lstStyle/>
           <a:p>
-            <a:pPr indent="0" marL="0">
+            <a:pPr marL="0" indent="0">
               <a:buNone/>
             </a:pPr>
             <a:r>
@@ -1732,7 +1566,7 @@
           <a:bodyPr wrap="square" lIns="0" tIns="0" rIns="0" bIns="0" rtlCol="0" anchor="ctr"/>
           <a:lstStyle/>
           <a:p>
-            <a:pPr indent="0" marL="0">
+            <a:pPr marL="0" indent="0">
               <a:buNone/>
             </a:pPr>
             <a:r>
@@ -1773,6 +1607,13 @@
             <a:tailEnd type="triangle"/>
           </a:ln>
         </p:spPr>
+        <p:txBody>
+          <a:bodyPr/>
+          <a:lstStyle/>
+          <a:p>
+            <a:endParaRPr lang="fr-FR"/>
+          </a:p>
+        </p:txBody>
       </p:sp>
       <p:sp>
         <p:nvSpPr>
@@ -1781,9 +1622,9 @@
           <p:nvPr/>
         </p:nvSpPr>
         <p:spPr>
-          <a:xfrm>
-            <a:off x="2697480" y="2788920"/>
-            <a:ext cx="365760" cy="-1143000"/>
+          <a:xfrm flipV="1">
+            <a:off x="2697480" y="1536192"/>
+            <a:ext cx="320040" cy="1252728"/>
           </a:xfrm>
           <a:prstGeom prst="line">
             <a:avLst/>
@@ -1797,6 +1638,13 @@
             <a:tailEnd type="triangle"/>
           </a:ln>
         </p:spPr>
+        <p:txBody>
+          <a:bodyPr/>
+          <a:lstStyle/>
+          <a:p>
+            <a:endParaRPr lang="fr-FR"/>
+          </a:p>
+        </p:txBody>
       </p:sp>
       <p:sp>
         <p:nvSpPr>
@@ -1821,6 +1669,13 @@
             <a:tailEnd type="triangle"/>
           </a:ln>
         </p:spPr>
+        <p:txBody>
+          <a:bodyPr/>
+          <a:lstStyle/>
+          <a:p>
+            <a:endParaRPr lang="fr-FR"/>
+          </a:p>
+        </p:txBody>
       </p:sp>
       <p:sp>
         <p:nvSpPr>
@@ -1845,6 +1700,13 @@
             <a:tailEnd type="triangle"/>
           </a:ln>
         </p:spPr>
+        <p:txBody>
+          <a:bodyPr/>
+          <a:lstStyle/>
+          <a:p>
+            <a:endParaRPr lang="fr-FR"/>
+          </a:p>
+        </p:txBody>
       </p:sp>
       <p:sp>
         <p:nvSpPr>
@@ -1853,9 +1715,9 @@
           <p:nvPr/>
         </p:nvSpPr>
         <p:spPr>
-          <a:xfrm>
-            <a:off x="4846320" y="4050792"/>
-            <a:ext cx="365760" cy="-1078992"/>
+          <a:xfrm flipV="1">
+            <a:off x="4846320" y="2834640"/>
+            <a:ext cx="365760" cy="1216152"/>
           </a:xfrm>
           <a:prstGeom prst="line">
             <a:avLst/>
@@ -1869,6 +1731,13 @@
             <a:tailEnd type="triangle"/>
           </a:ln>
         </p:spPr>
+        <p:txBody>
+          <a:bodyPr/>
+          <a:lstStyle/>
+          <a:p>
+            <a:endParaRPr lang="fr-FR"/>
+          </a:p>
+        </p:txBody>
       </p:sp>
       <p:sp>
         <p:nvSpPr>
@@ -1879,7 +1748,7 @@
         <p:spPr>
           <a:xfrm>
             <a:off x="5829300" y="2606040"/>
-            <a:ext cx="0" cy="-1453896"/>
+            <a:ext cx="0" cy="0"/>
           </a:xfrm>
           <a:prstGeom prst="line">
             <a:avLst/>
@@ -1893,6 +1762,13 @@
             <a:tailEnd type="none"/>
           </a:ln>
         </p:spPr>
+        <p:txBody>
+          <a:bodyPr/>
+          <a:lstStyle/>
+          <a:p>
+            <a:endParaRPr lang="fr-FR"/>
+          </a:p>
+        </p:txBody>
       </p:sp>
       <p:sp>
         <p:nvSpPr>
@@ -1903,7 +1779,7 @@
         <p:spPr>
           <a:xfrm>
             <a:off x="5829300" y="1152144"/>
-            <a:ext cx="-1874520" cy="0"/>
+            <a:ext cx="0" cy="0"/>
           </a:xfrm>
           <a:prstGeom prst="line">
             <a:avLst/>
@@ -1917,17 +1793,55 @@
             <a:tailEnd type="none"/>
           </a:ln>
         </p:spPr>
-      </p:sp>
-      <p:sp>
-        <p:nvSpPr>
-          <p:cNvPr id="11" name="Shape 9"/>
-          <p:cNvSpPr/>
-          <p:nvPr/>
-        </p:nvSpPr>
-        <p:spPr>
-          <a:xfrm>
-            <a:off x="3954780" y="1152144"/>
-            <a:ext cx="0" cy="219456"/>
+        <p:txBody>
+          <a:bodyPr/>
+          <a:lstStyle/>
+          <a:p>
+            <a:endParaRPr lang="fr-FR"/>
+          </a:p>
+        </p:txBody>
+      </p:sp>
+      <p:sp>
+        <p:nvSpPr>
+          <p:cNvPr id="13" name="Shape 11"/>
+          <p:cNvSpPr/>
+          <p:nvPr/>
+        </p:nvSpPr>
+        <p:spPr>
+          <a:xfrm>
+            <a:off x="5829300" y="4498848"/>
+            <a:ext cx="0" cy="0"/>
+          </a:xfrm>
+          <a:prstGeom prst="line">
+            <a:avLst/>
+          </a:prstGeom>
+          <a:noFill/>
+          <a:ln w="17780">
+            <a:solidFill>
+              <a:srgbClr val="E8E4F0"/>
+            </a:solidFill>
+            <a:prstDash val="dash"/>
+            <a:tailEnd type="none"/>
+          </a:ln>
+        </p:spPr>
+        <p:txBody>
+          <a:bodyPr/>
+          <a:lstStyle/>
+          <a:p>
+            <a:endParaRPr lang="fr-FR"/>
+          </a:p>
+        </p:txBody>
+      </p:sp>
+      <p:sp>
+        <p:nvSpPr>
+          <p:cNvPr id="15" name="Shape 13"/>
+          <p:cNvSpPr/>
+          <p:nvPr/>
+        </p:nvSpPr>
+        <p:spPr>
+          <a:xfrm flipV="1">
+            <a:off x="6446520" y="1618488"/>
+            <a:ext cx="411480" cy="1170432"/>
           </a:xfrm>
           <a:prstGeom prst="line">
             <a:avLst/>
@@ -1941,65 +1855,24 @@
             <a:tailEnd type="triangle"/>
           </a:ln>
         </p:spPr>
-      </p:sp>
-      <p:sp>
-        <p:nvSpPr>
-          <p:cNvPr id="12" name="Shape 10"/>
-          <p:cNvSpPr/>
-          <p:nvPr/>
-        </p:nvSpPr>
-        <p:spPr>
-          <a:xfrm>
-            <a:off x="5829300" y="3063240"/>
-            <a:ext cx="0" cy="1435608"/>
-          </a:xfrm>
-          <a:prstGeom prst="line">
-            <a:avLst/>
-          </a:prstGeom>
-          <a:noFill/>
-          <a:ln w="17780">
-            <a:solidFill>
-              <a:srgbClr val="E8E4F0"/>
-            </a:solidFill>
-            <a:prstDash val="dash"/>
-            <a:tailEnd type="none"/>
-          </a:ln>
-        </p:spPr>
-      </p:sp>
-      <p:sp>
-        <p:nvSpPr>
-          <p:cNvPr id="13" name="Shape 11"/>
-          <p:cNvSpPr/>
-          <p:nvPr/>
-        </p:nvSpPr>
-        <p:spPr>
-          <a:xfrm>
-            <a:off x="5829300" y="4498848"/>
-            <a:ext cx="-1874520" cy="0"/>
-          </a:xfrm>
-          <a:prstGeom prst="line">
-            <a:avLst/>
-          </a:prstGeom>
-          <a:noFill/>
-          <a:ln w="17780">
-            <a:solidFill>
-              <a:srgbClr val="E8E4F0"/>
-            </a:solidFill>
-            <a:prstDash val="dash"/>
-            <a:tailEnd type="none"/>
-          </a:ln>
-        </p:spPr>
-      </p:sp>
-      <p:sp>
-        <p:nvSpPr>
-          <p:cNvPr id="14" name="Shape 12"/>
-          <p:cNvSpPr/>
-          <p:nvPr/>
-        </p:nvSpPr>
-        <p:spPr>
-          <a:xfrm>
-            <a:off x="3954780" y="4498848"/>
-            <a:ext cx="0" cy="-201168"/>
+        <p:txBody>
+          <a:bodyPr/>
+          <a:lstStyle/>
+          <a:p>
+            <a:endParaRPr lang="fr-FR"/>
+          </a:p>
+        </p:txBody>
+      </p:sp>
+      <p:sp>
+        <p:nvSpPr>
+          <p:cNvPr id="16" name="Shape 14"/>
+          <p:cNvSpPr/>
+          <p:nvPr/>
+        </p:nvSpPr>
+        <p:spPr>
+          <a:xfrm>
+            <a:off x="6446520" y="2880360"/>
+            <a:ext cx="411480" cy="1143000"/>
           </a:xfrm>
           <a:prstGeom prst="line">
             <a:avLst/>
@@ -2013,54 +1886,13 @@
             <a:tailEnd type="triangle"/>
           </a:ln>
         </p:spPr>
-      </p:sp>
-      <p:sp>
-        <p:nvSpPr>
-          <p:cNvPr id="15" name="Shape 13"/>
-          <p:cNvSpPr/>
-          <p:nvPr/>
-        </p:nvSpPr>
-        <p:spPr>
-          <a:xfrm>
-            <a:off x="6446520" y="2788920"/>
-            <a:ext cx="411480" cy="-1143000"/>
-          </a:xfrm>
-          <a:prstGeom prst="line">
-            <a:avLst/>
-          </a:prstGeom>
-          <a:noFill/>
-          <a:ln w="17780">
-            <a:solidFill>
-              <a:srgbClr val="E8E4F0"/>
-            </a:solidFill>
-            <a:prstDash val="dash"/>
-            <a:tailEnd type="triangle"/>
-          </a:ln>
-        </p:spPr>
-      </p:sp>
-      <p:sp>
-        <p:nvSpPr>
-          <p:cNvPr id="16" name="Shape 14"/>
-          <p:cNvSpPr/>
-          <p:nvPr/>
-        </p:nvSpPr>
-        <p:spPr>
-          <a:xfrm>
-            <a:off x="6446520" y="2880360"/>
-            <a:ext cx="411480" cy="1143000"/>
-          </a:xfrm>
-          <a:prstGeom prst="line">
-            <a:avLst/>
-          </a:prstGeom>
-          <a:noFill/>
-          <a:ln w="17780">
-            <a:solidFill>
-              <a:srgbClr val="E8E4F0"/>
-            </a:solidFill>
-            <a:prstDash val="dash"/>
-            <a:tailEnd type="triangle"/>
-          </a:ln>
-        </p:spPr>
+        <p:txBody>
+          <a:bodyPr/>
+          <a:lstStyle/>
+          <a:p>
+            <a:endParaRPr lang="fr-FR"/>
+          </a:p>
+        </p:txBody>
       </p:sp>
       <p:sp>
         <p:nvSpPr>
@@ -2085,6 +1917,13 @@
             <a:tailEnd type="triangle"/>
           </a:ln>
         </p:spPr>
+        <p:txBody>
+          <a:bodyPr/>
+          <a:lstStyle/>
+          <a:p>
+            <a:endParaRPr lang="fr-FR"/>
+          </a:p>
+        </p:txBody>
       </p:sp>
       <p:sp>
         <p:nvSpPr>
@@ -2114,6 +1953,13 @@
             <a:prstDash val="solid"/>
           </a:ln>
         </p:spPr>
+        <p:txBody>
+          <a:bodyPr/>
+          <a:lstStyle/>
+          <a:p>
+            <a:endParaRPr lang="fr-FR"/>
+          </a:p>
+        </p:txBody>
       </p:sp>
       <p:sp>
         <p:nvSpPr>
@@ -2136,7 +1982,7 @@
           <a:bodyPr wrap="square" lIns="0" tIns="0" rIns="0" bIns="0" rtlCol="0" anchor="ctr"/>
           <a:lstStyle/>
           <a:p>
-            <a:pPr algn="ctr" indent="0" marL="0">
+            <a:pPr marL="0" indent="0" algn="ctr">
               <a:buNone/>
             </a:pPr>
             <a:r>
@@ -2175,13 +2021,20 @@
           </a:solidFill>
           <a:ln/>
           <a:effectLst>
-            <a:outerShdw sx="100000" sy="100000" kx="0" ky="0" algn="bl" rotWithShape="0" blurRad="114300" dist="50800" dir="16200000">
-              <a:srgbClr val="ff4757">
+            <a:outerShdw blurRad="114300" dist="50800" dir="16200000" algn="bl" rotWithShape="0">
+              <a:srgbClr val="FF4757">
                 <a:alpha val="30000"/>
               </a:srgbClr>
             </a:outerShdw>
           </a:effectLst>
         </p:spPr>
+        <p:txBody>
+          <a:bodyPr/>
+          <a:lstStyle/>
+          <a:p>
+            <a:endParaRPr lang="fr-FR"/>
+          </a:p>
+        </p:txBody>
       </p:sp>
       <p:sp>
         <p:nvSpPr>
@@ -2204,7 +2057,7 @@
           <a:bodyPr wrap="square" lIns="0" tIns="0" rIns="0" bIns="0" rtlCol="0" anchor="ctr"/>
           <a:lstStyle/>
           <a:p>
-            <a:pPr algn="ctr" indent="0" marL="0">
+            <a:pPr marL="0" indent="0" algn="ctr">
               <a:buNone/>
             </a:pPr>
             <a:r>
@@ -2250,6 +2103,13 @@
             <a:prstDash val="solid"/>
           </a:ln>
         </p:spPr>
+        <p:txBody>
+          <a:bodyPr/>
+          <a:lstStyle/>
+          <a:p>
+            <a:endParaRPr lang="fr-FR"/>
+          </a:p>
+        </p:txBody>
       </p:sp>
       <p:sp>
         <p:nvSpPr>
@@ -2272,7 +2132,7 @@
           <a:bodyPr wrap="square" lIns="0" tIns="0" rIns="0" bIns="0" rtlCol="0" anchor="ctr"/>
           <a:lstStyle/>
           <a:p>
-            <a:pPr algn="ctr" indent="0" marL="0">
+            <a:pPr marL="0" indent="0" algn="ctr">
               <a:buNone/>
             </a:pPr>
             <a:r>
@@ -2318,6 +2178,13 @@
             <a:prstDash val="solid"/>
           </a:ln>
         </p:spPr>
+        <p:txBody>
+          <a:bodyPr/>
+          <a:lstStyle/>
+          <a:p>
+            <a:endParaRPr lang="fr-FR"/>
+          </a:p>
+        </p:txBody>
       </p:sp>
       <p:sp>
         <p:nvSpPr>
@@ -2340,7 +2207,7 @@
           <a:bodyPr wrap="square" lIns="0" tIns="0" rIns="0" bIns="0" rtlCol="0" anchor="ctr"/>
           <a:lstStyle/>
           <a:p>
-            <a:pPr algn="ctr" indent="0" marL="0">
+            <a:pPr marL="0" indent="0" algn="ctr">
               <a:buNone/>
             </a:pPr>
             <a:r>
@@ -2379,13 +2246,20 @@
           </a:solidFill>
           <a:ln/>
           <a:effectLst>
-            <a:outerShdw sx="100000" sy="100000" kx="0" ky="0" algn="bl" rotWithShape="0" blurRad="114300" dist="50800" dir="16200000">
-              <a:srgbClr val="ff4757">
+            <a:outerShdw blurRad="114300" dist="50800" dir="16200000" algn="bl" rotWithShape="0">
+              <a:srgbClr val="FF4757">
                 <a:alpha val="30000"/>
               </a:srgbClr>
             </a:outerShdw>
           </a:effectLst>
         </p:spPr>
+        <p:txBody>
+          <a:bodyPr/>
+          <a:lstStyle/>
+          <a:p>
+            <a:endParaRPr lang="fr-FR"/>
+          </a:p>
+        </p:txBody>
       </p:sp>
       <p:sp>
         <p:nvSpPr>
@@ -2408,7 +2282,7 @@
           <a:bodyPr wrap="square" lIns="0" tIns="0" rIns="0" bIns="0" rtlCol="0" anchor="ctr"/>
           <a:lstStyle/>
           <a:p>
-            <a:pPr algn="ctr" indent="0" marL="0">
+            <a:pPr marL="0" indent="0" algn="ctr">
               <a:buNone/>
             </a:pPr>
             <a:r>
@@ -2454,6 +2328,13 @@
             <a:prstDash val="solid"/>
           </a:ln>
         </p:spPr>
+        <p:txBody>
+          <a:bodyPr/>
+          <a:lstStyle/>
+          <a:p>
+            <a:endParaRPr lang="fr-FR"/>
+          </a:p>
+        </p:txBody>
       </p:sp>
       <p:sp>
         <p:nvSpPr>
@@ -2476,7 +2357,7 @@
           <a:bodyPr wrap="square" lIns="0" tIns="0" rIns="0" bIns="0" rtlCol="0" anchor="ctr"/>
           <a:lstStyle/>
           <a:p>
-            <a:pPr algn="ctr" indent="0" marL="0">
+            <a:pPr marL="0" indent="0" algn="ctr">
               <a:buNone/>
             </a:pPr>
             <a:r>
@@ -2522,6 +2403,13 @@
             <a:prstDash val="solid"/>
           </a:ln>
         </p:spPr>
+        <p:txBody>
+          <a:bodyPr/>
+          <a:lstStyle/>
+          <a:p>
+            <a:endParaRPr lang="fr-FR"/>
+          </a:p>
+        </p:txBody>
       </p:sp>
       <p:sp>
         <p:nvSpPr>
@@ -2544,7 +2432,7 @@
           <a:bodyPr wrap="square" lIns="0" tIns="0" rIns="0" bIns="0" rtlCol="0" anchor="ctr"/>
           <a:lstStyle/>
           <a:p>
-            <a:pPr algn="ctr" indent="0" marL="0">
+            <a:pPr marL="0" indent="0" algn="ctr">
               <a:buNone/>
             </a:pPr>
             <a:r>
@@ -2590,6 +2478,13 @@
             <a:prstDash val="solid"/>
           </a:ln>
         </p:spPr>
+        <p:txBody>
+          <a:bodyPr/>
+          <a:lstStyle/>
+          <a:p>
+            <a:endParaRPr lang="fr-FR"/>
+          </a:p>
+        </p:txBody>
       </p:sp>
       <p:sp>
         <p:nvSpPr>
@@ -2612,7 +2507,7 @@
           <a:bodyPr wrap="square" lIns="0" tIns="0" rIns="0" bIns="0" rtlCol="0" anchor="ctr"/>
           <a:lstStyle/>
           <a:p>
-            <a:pPr algn="ctr" indent="0" marL="0">
+            <a:pPr marL="0" indent="0" algn="ctr">
               <a:buNone/>
             </a:pPr>
             <a:r>
@@ -2658,6 +2553,13 @@
             <a:prstDash val="solid"/>
           </a:ln>
         </p:spPr>
+        <p:txBody>
+          <a:bodyPr/>
+          <a:lstStyle/>
+          <a:p>
+            <a:endParaRPr lang="fr-FR"/>
+          </a:p>
+        </p:txBody>
       </p:sp>
       <p:sp>
         <p:nvSpPr>
@@ -2680,7 +2582,7 @@
           <a:bodyPr wrap="square" lIns="0" tIns="0" rIns="0" bIns="0" rtlCol="0" anchor="ctr"/>
           <a:lstStyle/>
           <a:p>
-            <a:pPr algn="ctr" indent="0" marL="0">
+            <a:pPr marL="0" indent="0" algn="ctr">
               <a:buNone/>
             </a:pPr>
             <a:r>
@@ -2726,6 +2628,13 @@
             <a:prstDash val="solid"/>
           </a:ln>
         </p:spPr>
+        <p:txBody>
+          <a:bodyPr/>
+          <a:lstStyle/>
+          <a:p>
+            <a:endParaRPr lang="fr-FR"/>
+          </a:p>
+        </p:txBody>
       </p:sp>
       <p:sp>
         <p:nvSpPr>
@@ -2748,7 +2657,7 @@
           <a:bodyPr wrap="square" lIns="0" tIns="0" rIns="0" bIns="0" rtlCol="0" anchor="ctr"/>
           <a:lstStyle/>
           <a:p>
-            <a:pPr algn="ctr" indent="0" marL="0">
+            <a:pPr marL="0" indent="0" algn="ctr">
               <a:buNone/>
             </a:pPr>
             <a:r>
@@ -2794,6 +2703,13 @@
             <a:prstDash val="solid"/>
           </a:ln>
         </p:spPr>
+        <p:txBody>
+          <a:bodyPr/>
+          <a:lstStyle/>
+          <a:p>
+            <a:endParaRPr lang="fr-FR"/>
+          </a:p>
+        </p:txBody>
       </p:sp>
       <p:sp>
         <p:nvSpPr>
@@ -2816,7 +2732,7 @@
           <a:bodyPr wrap="square" lIns="0" tIns="0" rIns="0" bIns="0" rtlCol="0" anchor="ctr"/>
           <a:lstStyle/>
           <a:p>
-            <a:pPr algn="ctr" indent="0" marL="0">
+            <a:pPr marL="0" indent="0" algn="ctr">
               <a:buNone/>
             </a:pPr>
             <a:r>
@@ -2856,6 +2772,13 @@
             <a:prstDash val="solid"/>
           </a:ln>
         </p:spPr>
+        <p:txBody>
+          <a:bodyPr/>
+          <a:lstStyle/>
+          <a:p>
+            <a:endParaRPr lang="fr-FR"/>
+          </a:p>
+        </p:txBody>
       </p:sp>
       <p:sp>
         <p:nvSpPr>
@@ -2878,7 +2801,7 @@
           <a:bodyPr wrap="square" lIns="0" tIns="0" rIns="0" bIns="0" rtlCol="0" anchor="ctr"/>
           <a:lstStyle/>
           <a:p>
-            <a:pPr indent="0" marL="0">
+            <a:pPr marL="0" indent="0">
               <a:buNone/>
             </a:pPr>
             <a:r>
@@ -2918,6 +2841,13 @@
             <a:prstDash val="dash"/>
           </a:ln>
         </p:spPr>
+        <p:txBody>
+          <a:bodyPr/>
+          <a:lstStyle/>
+          <a:p>
+            <a:endParaRPr lang="fr-FR"/>
+          </a:p>
+        </p:txBody>
       </p:sp>
       <p:sp>
         <p:nvSpPr>
@@ -2940,7 +2870,7 @@
           <a:bodyPr wrap="square" lIns="0" tIns="0" rIns="0" bIns="0" rtlCol="0" anchor="ctr"/>
           <a:lstStyle/>
           <a:p>
-            <a:pPr indent="0" marL="0">
+            <a:pPr marL="0" indent="0">
               <a:buNone/>
             </a:pPr>
             <a:r>
@@ -2958,6 +2888,138 @@
           </a:p>
         </p:txBody>
       </p:sp>
+      <p:cxnSp>
+        <p:nvCxnSpPr>
+          <p:cNvPr id="45" name="Connecteur : en angle 44">
+            <a:extLst>
+              <a:ext uri="{FF2B5EF4-FFF2-40B4-BE49-F238E27FC236}">
+                <a16:creationId xmlns:a16="http://schemas.microsoft.com/office/drawing/2014/main" id="{6FB773B3-2979-EA24-2CF2-200FF82786B3}"/>
+              </a:ext>
+            </a:extLst>
+          </p:cNvPr>
+          <p:cNvCxnSpPr>
+            <a:stCxn id="26" idx="0"/>
+            <a:endCxn id="33" idx="3"/>
+          </p:cNvCxnSpPr>
+          <p:nvPr/>
+        </p:nvCxnSpPr>
+        <p:spPr>
+          <a:xfrm rot="16200000" flipV="1">
+            <a:off x="4873752" y="1650492"/>
+            <a:ext cx="1453896" cy="457200"/>
+          </a:xfrm>
+          <a:prstGeom prst="bentConnector2">
+            <a:avLst/>
+          </a:prstGeom>
+          <a:noFill/>
+          <a:ln w="17780">
+            <a:solidFill>
+              <a:srgbClr val="E8E4F0"/>
+            </a:solidFill>
+            <a:prstDash val="dash"/>
+            <a:tailEnd type="triangle"/>
+          </a:ln>
+        </p:spPr>
+      </p:cxnSp>
+      <p:cxnSp>
+        <p:nvCxnSpPr>
+          <p:cNvPr id="47" name="Connecteur : en angle 46">
+            <a:extLst>
+              <a:ext uri="{FF2B5EF4-FFF2-40B4-BE49-F238E27FC236}">
+                <a16:creationId xmlns:a16="http://schemas.microsoft.com/office/drawing/2014/main" id="{3C4B0889-C8AE-3BB1-04CD-C521ADC0142E}"/>
+              </a:ext>
+            </a:extLst>
+          </p:cNvPr>
+          <p:cNvCxnSpPr>
+            <a:stCxn id="33" idx="1"/>
+            <a:endCxn id="23" idx="0"/>
+          </p:cNvCxnSpPr>
+          <p:nvPr/>
+        </p:nvCxnSpPr>
+        <p:spPr>
+          <a:xfrm rot="10800000" flipV="1">
+            <a:off x="3954780" y="1152144"/>
+            <a:ext cx="457200" cy="219456"/>
+          </a:xfrm>
+          <a:prstGeom prst="bentConnector2">
+            <a:avLst/>
+          </a:prstGeom>
+          <a:noFill/>
+          <a:ln w="17780">
+            <a:solidFill>
+              <a:srgbClr val="E8E4F0"/>
+            </a:solidFill>
+            <a:prstDash val="dash"/>
+            <a:tailEnd type="triangle"/>
+          </a:ln>
+        </p:spPr>
+      </p:cxnSp>
+      <p:cxnSp>
+        <p:nvCxnSpPr>
+          <p:cNvPr id="49" name="Connecteur : en angle 48">
+            <a:extLst>
+              <a:ext uri="{FF2B5EF4-FFF2-40B4-BE49-F238E27FC236}">
+                <a16:creationId xmlns:a16="http://schemas.microsoft.com/office/drawing/2014/main" id="{C4614484-3804-0315-A2D9-91DEED630159}"/>
+              </a:ext>
+            </a:extLst>
+          </p:cNvPr>
+          <p:cNvCxnSpPr>
+            <a:stCxn id="27" idx="2"/>
+            <a:endCxn id="35" idx="3"/>
+          </p:cNvCxnSpPr>
+          <p:nvPr/>
+        </p:nvCxnSpPr>
+        <p:spPr>
+          <a:xfrm rot="5400000">
+            <a:off x="4882896" y="3552444"/>
+            <a:ext cx="1435608" cy="457200"/>
+          </a:xfrm>
+          <a:prstGeom prst="bentConnector2">
+            <a:avLst/>
+          </a:prstGeom>
+          <a:noFill/>
+          <a:ln w="17780">
+            <a:solidFill>
+              <a:srgbClr val="E8E4F0"/>
+            </a:solidFill>
+            <a:prstDash val="dash"/>
+            <a:tailEnd type="triangle"/>
+          </a:ln>
+        </p:spPr>
+      </p:cxnSp>
+      <p:cxnSp>
+        <p:nvCxnSpPr>
+          <p:cNvPr id="51" name="Connecteur : en angle 50">
+            <a:extLst>
+              <a:ext uri="{FF2B5EF4-FFF2-40B4-BE49-F238E27FC236}">
+                <a16:creationId xmlns:a16="http://schemas.microsoft.com/office/drawing/2014/main" id="{9F7E212F-CE90-9EC0-A7A1-A6C4DF342F39}"/>
+              </a:ext>
+            </a:extLst>
+          </p:cNvPr>
+          <p:cNvCxnSpPr>
+            <a:stCxn id="35" idx="1"/>
+            <a:endCxn id="24" idx="2"/>
+          </p:cNvCxnSpPr>
+          <p:nvPr/>
+        </p:nvCxnSpPr>
+        <p:spPr>
+          <a:xfrm rot="10800000">
+            <a:off x="3954780" y="4297680"/>
+            <a:ext cx="457200" cy="201168"/>
+          </a:xfrm>
+          <a:prstGeom prst="bentConnector2">
+            <a:avLst/>
+          </a:prstGeom>
+          <a:noFill/>
+          <a:ln w="17780">
+            <a:solidFill>
+              <a:srgbClr val="E8E4F0"/>
+            </a:solidFill>
+            <a:prstDash val="dash"/>
+            <a:tailEnd type="triangle"/>
+          </a:ln>
+        </p:spPr>
+      </p:cxnSp>
     </p:spTree>
   </p:cSld>
   <p:clrMapOvr>
@@ -3259,4 +3321,319 @@
     </a:ext>
   </a:extLst>
 </a:theme>
+</file>
+
+<file path=ppt/theme/theme2.xml><?xml version="1.0" encoding="utf-8"?>
+<a:theme xmlns:a="http://schemas.openxmlformats.org/drawingml/2006/main" name="Thème Office">
+  <a:themeElements>
+    <a:clrScheme name="Office">
+      <a:dk1>
+        <a:sysClr val="windowText" lastClr="000000"/>
+      </a:dk1>
+      <a:lt1>
+        <a:sysClr val="window" lastClr="FFFFFF"/>
+      </a:lt1>
+      <a:dk2>
+        <a:srgbClr val="0E2841"/>
+      </a:dk2>
+      <a:lt2>
+        <a:srgbClr val="E8E8E8"/>
+      </a:lt2>
+      <a:accent1>
+        <a:srgbClr val="156082"/>
+      </a:accent1>
+      <a:accent2>
+        <a:srgbClr val="E97132"/>
+      </a:accent2>
+      <a:accent3>
+        <a:srgbClr val="196B24"/>
+      </a:accent3>
+      <a:accent4>
+        <a:srgbClr val="0F9ED5"/>
+      </a:accent4>
+      <a:accent5>
+        <a:srgbClr val="A02B93"/>
+      </a:accent5>
+      <a:accent6>
+        <a:srgbClr val="4EA72E"/>
+      </a:accent6>
+      <a:hlink>
+        <a:srgbClr val="467886"/>
+      </a:hlink>
+      <a:folHlink>
+        <a:srgbClr val="96607D"/>
+      </a:folHlink>
+    </a:clrScheme>
+    <a:fontScheme name="Office">
+      <a:majorFont>
+        <a:latin typeface="Aptos Display" panose="02110004020202020204"/>
+        <a:ea typeface=""/>
+        <a:cs typeface=""/>
+        <a:font script="Jpan" typeface="游ゴシック Light"/>
+        <a:font script="Hang" typeface="맑은 고딕"/>
+        <a:font script="Hans" typeface="等线 Light"/>
+        <a:font script="Hant" typeface="新細明體"/>
+        <a:font script="Arab" typeface="Times New Roman"/>
+        <a:font script="Hebr" typeface="Times New Roman"/>
+        <a:font script="Thai" typeface="Angsana New"/>
+        <a:font script="Ethi" typeface="Nyala"/>
+        <a:font script="Beng" typeface="Vrinda"/>
+        <a:font script="Gujr" typeface="Shruti"/>
+        <a:font script="Khmr" typeface="MoolBoran"/>
+        <a:font script="Knda" typeface="Tunga"/>
+        <a:font script="Guru" typeface="Raavi"/>
+        <a:font script="Cans" typeface="Euphemia"/>
+        <a:font script="Cher" typeface="Plantagenet Cherokee"/>
+        <a:font script="Yiii" typeface="Microsoft Yi Baiti"/>
+        <a:font script="Tibt" typeface="Microsoft Himalaya"/>
+        <a:font script="Thaa" typeface="MV Boli"/>
+        <a:font script="Deva" typeface="Mangal"/>
+        <a:font script="Telu" typeface="Gautami"/>
+        <a:font script="Taml" typeface="Latha"/>
+        <a:font script="Syrc" typeface="Estrangelo Edessa"/>
+        <a:font script="Orya" typeface="Kalinga"/>
+        <a:font script="Mlym" typeface="Kartika"/>
+        <a:font script="Laoo" typeface="DokChampa"/>
+        <a:font script="Sinh" typeface="Iskoola Pota"/>
+        <a:font script="Mong" typeface="Mongolian Baiti"/>
+        <a:font script="Viet" typeface="Times New Roman"/>
+        <a:font script="Uigh" typeface="Microsoft Uighur"/>
+        <a:font script="Geor" typeface="Sylfaen"/>
+        <a:font script="Armn" typeface="Arial"/>
+        <a:font script="Bugi" typeface="Leelawadee UI"/>
+        <a:font script="Bopo" typeface="Microsoft JhengHei"/>
+        <a:font script="Java" typeface="Javanese Text"/>
+        <a:font script="Lisu" typeface="Segoe UI"/>
+        <a:font script="Mymr" typeface="Myanmar Text"/>
+        <a:font script="Nkoo" typeface="Ebrima"/>
+        <a:font script="Olck" typeface="Nirmala UI"/>
+        <a:font script="Osma" typeface="Ebrima"/>
+        <a:font script="Phag" typeface="Phagspa"/>
+        <a:font script="Syrn" typeface="Estrangelo Edessa"/>
+        <a:font script="Syrj" typeface="Estrangelo Edessa"/>
+        <a:font script="Syre" typeface="Estrangelo Edessa"/>
+        <a:font script="Sora" typeface="Nirmala UI"/>
+        <a:font script="Tale" typeface="Microsoft Tai Le"/>
+        <a:font script="Talu" typeface="Microsoft New Tai Lue"/>
+        <a:font script="Tfng" typeface="Ebrima"/>
+      </a:majorFont>
+      <a:minorFont>
+        <a:latin typeface="Aptos" panose="02110004020202020204"/>
+        <a:ea typeface=""/>
+        <a:cs typeface=""/>
+        <a:font script="Jpan" typeface="游ゴシック"/>
+        <a:font script="Hang" typeface="맑은 고딕"/>
+        <a:font script="Hans" typeface="等线"/>
+        <a:font script="Hant" typeface="新細明體"/>
+        <a:font script="Arab" typeface="Arial"/>
+        <a:font script="Hebr" typeface="Arial"/>
+        <a:font script="Thai" typeface="Cordia New"/>
+        <a:font script="Ethi" typeface="Nyala"/>
+        <a:font script="Beng" typeface="Vrinda"/>
+        <a:font script="Gujr" typeface="Shruti"/>
+        <a:font script="Khmr" typeface="DaunPenh"/>
+        <a:font script="Knda" typeface="Tunga"/>
+        <a:font script="Guru" typeface="Raavi"/>
+        <a:font script="Cans" typeface="Euphemia"/>
+        <a:font script="Cher" typeface="Plantagenet Cherokee"/>
+        <a:font script="Yiii" typeface="Microsoft Yi Baiti"/>
+        <a:font script="Tibt" typeface="Microsoft Himalaya"/>
+        <a:font script="Thaa" typeface="MV Boli"/>
+        <a:font script="Deva" typeface="Mangal"/>
+        <a:font script="Telu" typeface="Gautami"/>
+        <a:font script="Taml" typeface="Latha"/>
+        <a:font script="Syrc" typeface="Estrangelo Edessa"/>
+        <a:font script="Orya" typeface="Kalinga"/>
+        <a:font script="Mlym" typeface="Kartika"/>
+        <a:font script="Laoo" typeface="DokChampa"/>
+        <a:font script="Sinh" typeface="Iskoola Pota"/>
+        <a:font script="Mong" typeface="Mongolian Baiti"/>
+        <a:font script="Viet" typeface="Arial"/>
+        <a:font script="Uigh" typeface="Microsoft Uighur"/>
+        <a:font script="Geor" typeface="Sylfaen"/>
+        <a:font script="Armn" typeface="Arial"/>
+        <a:font script="Bugi" typeface="Leelawadee UI"/>
+        <a:font script="Bopo" typeface="Microsoft JhengHei"/>
+        <a:font script="Java" typeface="Javanese Text"/>
+        <a:font script="Lisu" typeface="Segoe UI"/>
+        <a:font script="Mymr" typeface="Myanmar Text"/>
+        <a:font script="Nkoo" typeface="Ebrima"/>
+        <a:font script="Olck" typeface="Nirmala UI"/>
+        <a:font script="Osma" typeface="Ebrima"/>
+        <a:font script="Phag" typeface="Phagspa"/>
+        <a:font script="Syrn" typeface="Estrangelo Edessa"/>
+        <a:font script="Syrj" typeface="Estrangelo Edessa"/>
+        <a:font script="Syre" typeface="Estrangelo Edessa"/>
+        <a:font script="Sora" typeface="Nirmala UI"/>
+        <a:font script="Tale" typeface="Microsoft Tai Le"/>
+        <a:font script="Talu" typeface="Microsoft New Tai Lue"/>
+        <a:font script="Tfng" typeface="Ebrima"/>
+      </a:minorFont>
+    </a:fontScheme>
+    <a:fmtScheme name="Office">
+      <a:fillStyleLst>
+        <a:solidFill>
+          <a:schemeClr val="phClr"/>
+        </a:solidFill>
+        <a:gradFill rotWithShape="1">
+          <a:gsLst>
+            <a:gs pos="0">
+              <a:schemeClr val="phClr">
+                <a:lumMod val="110000"/>
+                <a:satMod val="105000"/>
+                <a:tint val="67000"/>
+              </a:schemeClr>
+            </a:gs>
+            <a:gs pos="50000">
+              <a:schemeClr val="phClr">
+                <a:lumMod val="105000"/>
+                <a:satMod val="103000"/>
+                <a:tint val="73000"/>
+              </a:schemeClr>
+            </a:gs>
+            <a:gs pos="100000">
+              <a:schemeClr val="phClr">
+                <a:lumMod val="105000"/>
+                <a:satMod val="109000"/>
+                <a:tint val="81000"/>
+              </a:schemeClr>
+            </a:gs>
+          </a:gsLst>
+          <a:lin ang="5400000" scaled="0"/>
+        </a:gradFill>
+        <a:gradFill rotWithShape="1">
+          <a:gsLst>
+            <a:gs pos="0">
+              <a:schemeClr val="phClr">
+                <a:satMod val="103000"/>
+                <a:lumMod val="102000"/>
+                <a:tint val="94000"/>
+              </a:schemeClr>
+            </a:gs>
+            <a:gs pos="50000">
+              <a:schemeClr val="phClr">
+                <a:satMod val="110000"/>
+                <a:lumMod val="100000"/>
+                <a:shade val="100000"/>
+              </a:schemeClr>
+            </a:gs>
+            <a:gs pos="100000">
+              <a:schemeClr val="phClr">
+                <a:lumMod val="99000"/>
+                <a:satMod val="120000"/>
+                <a:shade val="78000"/>
+              </a:schemeClr>
+            </a:gs>
+          </a:gsLst>
+          <a:lin ang="5400000" scaled="0"/>
+        </a:gradFill>
+      </a:fillStyleLst>
+      <a:lnStyleLst>
+        <a:ln w="12700" cap="flat" cmpd="sng" algn="ctr">
+          <a:solidFill>
+            <a:schemeClr val="phClr"/>
+          </a:solidFill>
+          <a:prstDash val="solid"/>
+          <a:miter lim="800000"/>
+        </a:ln>
+        <a:ln w="19050" cap="flat" cmpd="sng" algn="ctr">
+          <a:solidFill>
+            <a:schemeClr val="phClr"/>
+          </a:solidFill>
+          <a:prstDash val="solid"/>
+          <a:miter lim="800000"/>
+        </a:ln>
+        <a:ln w="25400" cap="flat" cmpd="sng" algn="ctr">
+          <a:solidFill>
+            <a:schemeClr val="phClr"/>
+          </a:solidFill>
+          <a:prstDash val="solid"/>
+          <a:miter lim="800000"/>
+        </a:ln>
+      </a:lnStyleLst>
+      <a:effectStyleLst>
+        <a:effectStyle>
+          <a:effectLst/>
+        </a:effectStyle>
+        <a:effectStyle>
+          <a:effectLst/>
+        </a:effectStyle>
+        <a:effectStyle>
+          <a:effectLst>
+            <a:outerShdw blurRad="57150" dist="19050" dir="5400000" algn="ctr" rotWithShape="0">
+              <a:srgbClr val="000000">
+                <a:alpha val="63000"/>
+              </a:srgbClr>
+            </a:outerShdw>
+          </a:effectLst>
+        </a:effectStyle>
+      </a:effectStyleLst>
+      <a:bgFillStyleLst>
+        <a:solidFill>
+          <a:schemeClr val="phClr"/>
+        </a:solidFill>
+        <a:solidFill>
+          <a:schemeClr val="phClr">
+            <a:tint val="95000"/>
+            <a:satMod val="170000"/>
+          </a:schemeClr>
+        </a:solidFill>
+        <a:gradFill rotWithShape="1">
+          <a:gsLst>
+            <a:gs pos="0">
+              <a:schemeClr val="phClr">
+                <a:tint val="93000"/>
+                <a:satMod val="150000"/>
+                <a:shade val="98000"/>
+                <a:lumMod val="102000"/>
+              </a:schemeClr>
+            </a:gs>
+            <a:gs pos="50000">
+              <a:schemeClr val="phClr">
+                <a:tint val="98000"/>
+                <a:satMod val="130000"/>
+                <a:shade val="90000"/>
+                <a:lumMod val="103000"/>
+              </a:schemeClr>
+            </a:gs>
+            <a:gs pos="100000">
+              <a:schemeClr val="phClr">
+                <a:shade val="63000"/>
+                <a:satMod val="120000"/>
+              </a:schemeClr>
+            </a:gs>
+          </a:gsLst>
+          <a:lin ang="5400000" scaled="0"/>
+        </a:gradFill>
+      </a:bgFillStyleLst>
+    </a:fmtScheme>
+  </a:themeElements>
+  <a:objectDefaults>
+    <a:lnDef>
+      <a:spPr/>
+      <a:bodyPr/>
+      <a:lstStyle/>
+      <a:style>
+        <a:lnRef idx="2">
+          <a:schemeClr val="accent1"/>
+        </a:lnRef>
+        <a:fillRef idx="0">
+          <a:schemeClr val="accent1"/>
+        </a:fillRef>
+        <a:effectRef idx="1">
+          <a:schemeClr val="accent1"/>
+        </a:effectRef>
+        <a:fontRef idx="minor">
+          <a:schemeClr val="tx1"/>
+        </a:fontRef>
+      </a:style>
+    </a:lnDef>
+  </a:objectDefaults>
+  <a:extraClrSchemeLst/>
+  <a:extLst>
+    <a:ext uri="{05A4C25C-085E-4340-85A3-A5531E510DB2}">
+      <thm15:themeFamily xmlns:thm15="http://schemas.microsoft.com/office/thememl/2012/main" name="Office Theme" id="{2E142A2C-CD16-42D6-873A-C26D2A0506FA}" vid="{1BDDFF52-6CD6-40A5-AB3C-68EB2F1E4D0A}"/>
+    </a:ext>
+  </a:extLst>
+</a:theme>
 </file>